--- a/output/pptx/Smart-Dossier-Hackathon-Jury.pptx
+++ b/output/pptx/Smart-Dossier-Hackathon-Jury.pptx
@@ -1425,8 +1425,8 @@
         </p:nvSpPr>
         <p:spPr>
           <a:xfrm>
-            <a:off x="566928" y="1261872"/>
-            <a:ext cx="5394960" cy="2148840"/>
+            <a:off x="566928" y="1115568"/>
+            <a:ext cx="4663440" cy="2514600"/>
           </a:xfrm>
           <a:prstGeom prst="rect">
             <a:avLst/>
@@ -1444,7 +1444,7 @@
               <a:buNone/>
             </a:pPr>
             <a:r>
-              <a:rPr lang="en-US" sz="5000" b="1" dirty="0">
+              <a:rPr lang="en-US" sz="4800" b="1" dirty="0">
                 <a:solidFill>
                   <a:srgbClr val="FFFFFF"/>
                 </a:solidFill>
@@ -1452,16 +1452,16 @@
                 <a:ea typeface="Aptos" pitchFamily="34" charset="-122"/>
                 <a:cs typeface="Aptos" pitchFamily="34" charset="-120"/>
               </a:rPr>
-              <a:t>Property services,</a:t>
-            </a:r>
-            <a:endParaRPr lang="en-US" sz="5000" dirty="0"/>
+              <a:t>Property</a:t>
+            </a:r>
+            <a:endParaRPr lang="en-US" sz="4800" dirty="0"/>
           </a:p>
           <a:p>
             <a:pPr algn="l" indent="0" marL="0">
               <a:buNone/>
             </a:pPr>
             <a:r>
-              <a:rPr lang="en-US" sz="5000" b="1" dirty="0">
+              <a:rPr lang="en-US" sz="4800" b="1" dirty="0">
                 <a:solidFill>
                   <a:srgbClr val="FFFFFF"/>
                 </a:solidFill>
@@ -1469,9 +1469,26 @@
                 <a:ea typeface="Aptos" pitchFamily="34" charset="-122"/>
                 <a:cs typeface="Aptos" pitchFamily="34" charset="-120"/>
               </a:rPr>
+              <a:t>services,</a:t>
+            </a:r>
+            <a:endParaRPr lang="en-US" sz="4800" dirty="0"/>
+          </a:p>
+          <a:p>
+            <a:pPr algn="l" indent="0" marL="0">
+              <a:buNone/>
+            </a:pPr>
+            <a:r>
+              <a:rPr lang="en-US" sz="4800" b="1" dirty="0">
+                <a:solidFill>
+                  <a:srgbClr val="FFFFFF"/>
+                </a:solidFill>
+                <a:latin typeface="Aptos" pitchFamily="34" charset="0"/>
+                <a:ea typeface="Aptos" pitchFamily="34" charset="-122"/>
+                <a:cs typeface="Aptos" pitchFamily="34" charset="-120"/>
+              </a:rPr>
               <a:t>made clear.</a:t>
             </a:r>
-            <a:endParaRPr lang="en-US" sz="5000" dirty="0"/>
+            <a:endParaRPr lang="en-US" sz="4800" dirty="0"/>
           </a:p>
         </p:txBody>
       </p:sp>
@@ -1483,7 +1500,7 @@
         </p:nvSpPr>
         <p:spPr>
           <a:xfrm>
-            <a:off x="566928" y="3694176"/>
+            <a:off x="566928" y="3822192"/>
             <a:ext cx="5166360" cy="658368"/>
           </a:xfrm>
           <a:prstGeom prst="rect">
@@ -1502,7 +1519,7 @@
               <a:buNone/>
             </a:pPr>
             <a:r>
-              <a:rPr lang="en-US" sz="1900" dirty="0">
+              <a:rPr lang="en-US" sz="1850" dirty="0">
                 <a:solidFill>
                   <a:srgbClr val="DDEBFF"/>
                 </a:solidFill>
@@ -1512,7 +1529,7 @@
               </a:rPr>
               <a:t>A digital workspace for applications, case tracking, operational queues and management reporting.</a:t>
             </a:r>
-            <a:endParaRPr lang="en-US" sz="1900" dirty="0"/>
+            <a:endParaRPr lang="en-US" sz="1850" dirty="0"/>
           </a:p>
         </p:txBody>
       </p:sp>
